--- a/提交材料/雨证-路演PPT.pptx
+++ b/提交材料/雨证-路演PPT.pptx
@@ -1577,7 +1577,7 @@
           <a:lstStyle/>
           <a:p>
             <a:r>
-              <a:t>这一页是我们全部参数，全部从链上读出来，不是宣传材料。两条链分开说：Sepolia 是演示基线，BOT Chain 968 是承保层。地址一样，但是两个合约 —— 这一点我们从不混着讲。</a:t>
+              <a:t>这一页是我们全部参数，全部从链上读出来，不是宣传材料。两条链分开说：演示页读的是 BOT Chain 968 上的 v2，Sepolia 上是第一阶段的 v1 留痕。地址一样，但是两个合约 —— 这一点我们从不混着讲。</a:t>
             </a:r>
           </a:p>
         </p:txBody>
@@ -16532,7 +16532,7 @@
                 <a:ea typeface="微软雅黑"/>
                 <a:cs typeface="微软雅黑"/>
               </a:rPr>
-              <a:t>两条链：Sepolia 11155111 是 v1 演示基线（真实数据 DENY 在这里）；BOT Chain 968 是 v2 承保层（九项改动，彩排 25 项断言全绿）。地址同为 0x89e7C942535930B61cB61631051E8b0bD670596a —— 同一个地址在两条链上是两个合约，绝不混写。</a:t>
+              <a:t>两条链：BOT Chain 测试网 968 是演示页读的那一条（v2 承保层，九项改动，彩排 25 项断言全绿）；Sepolia 11155111 上是第一阶段的 v1 留痕（真实数据 DENY 在这里）。地址同为 0x89e7C942535930B61cB61631051E8b0bD670596a —— 同一个地址在两条链上是两个合约，绝不混写；数值单位在 Sepolia 上是 ETH、在 BOT Chain 上是 BOT（合约常量同一套）。</a:t>
             </a:r>
           </a:p>
         </p:txBody>
@@ -20582,7 +20582,7 @@
       </p:sp>
       <p:pic>
         <p:nvPicPr>
-          <p:cNvPr id="3" name="Picture 2" descr="演示页-2026-10-07.png"/>
+          <p:cNvPr id="3" name="Picture 2" descr="演示页-968-视口.png"/>
           <p:cNvPicPr>
             <a:picLocks noChangeAspect="1"/>
           </p:cNvPicPr>
@@ -20818,7 +20818,7 @@
                 <a:ea typeface="微软雅黑"/>
                 <a:cs typeface="微软雅黑"/>
               </a:rPr>
-              <a:t>线上页面直连 Sepolia 节点，没有服务器、没有区块浏览器、没有缓存。</a:t>
+              <a:t>线上页面直连 BOT Chain 测试网 968 的节点，没有服务器、没有区块浏览器、没有缓存。</a:t>
             </a:r>
           </a:p>
         </p:txBody>

--- a/提交材料/雨证-路演PPT.pptx
+++ b/提交材料/雨证-路演PPT.pptx
@@ -18020,7 +18020,7 @@
                 <a:ea typeface="微软雅黑"/>
                 <a:cs typeface="微软雅黑"/>
               </a:rPr>
-              <a:t>五套共 232 项，全绿。</a:t>
+              <a:t>九套共 426 项，全绿。</a:t>
             </a:r>
           </a:p>
           <a:p>
@@ -18207,7 +18207,7 @@
                 <a:ea typeface="微软雅黑"/>
                 <a:cs typeface="微软雅黑"/>
               </a:rPr>
-              <a:t>cd 07-测试工具 &amp;&amp; npm test —— 五套 232 项断言（8 + 29 + 21 + 73 + 101）</a:t>
+              <a:t>cd 07-测试工具 &amp;&amp; npm test —— 九套 426 项断言（8 + 29 + 27 + 19 + 9 + 73 + 101 + 73 + 87）</a:t>
             </a:r>
           </a:p>
           <a:p>
